--- a/assets/figures-editable/appendix-studies/a-e14.pptx
+++ b/assets/figures-editable/appendix-studies/a-e14.pptx
@@ -7,7 +7,7 @@
   <p:sldIdLst>
     <p:sldId id="256" r:id="rId7"/>
   </p:sldIdLst>
-  <p:sldSz cx="8961120" cy="5870448" type="screen4x3"/>
+  <p:sldSz cx="12191695" cy="6858000" type="screen4x3"/>
   <p:notesSz cx="6858000" cy="9144000"/>
   <p:defaultTextStyle>
     <a:defPPr>
@@ -3098,14 +3098,14 @@
       <p:grpSpPr/>
       <p:sp>
         <p:nvSpPr>
-          <p:cNvPr id="2" name="text 0" descr="sci-ppt:obj-000"/>
+          <p:cNvPr id="2" name="A-E14 text 0" descr="sci-ppt:o000"/>
           <p:cNvSpPr txBox="1"/>
           <p:nvPr/>
         </p:nvSpPr>
         <p:spPr>
           <a:xfrm>
-            <a:off x="256032" y="137160"/>
-            <a:ext cx="7315200" cy="310896"/>
+            <a:off x="274320" y="118872"/>
+            <a:ext cx="11612880" cy="340105"/>
           </a:xfrm>
           <a:prstGeom prst="rect">
             <a:avLst/>
@@ -3114,7 +3114,7 @@
           <a:effectLst/>
         </p:spPr>
         <p:txBody>
-          <a:bodyPr wrap="none" lIns="0" rIns="0" tIns="0" bIns="0" anchor="ctr">
+          <a:bodyPr wrap="none" lIns="18288" rIns="18288" tIns="18288" bIns="18288" anchor="t">
             <a:spAutoFit/>
           </a:bodyPr>
           <a:lstStyle/>
@@ -3125,35 +3125,121 @@
               </a:spcAft>
             </a:pPr>
             <a:r>
-              <a:rPr sz="1439" b="0" i="0">
+              <a:rPr sz="1900" b="1" i="0">
                 <a:solidFill>
                   <a:srgbClr val="8EDBD4"/>
                 </a:solidFill>
                 <a:latin typeface="Arial"/>
               </a:rPr>
-              <a:t>A-E14 · Physical variable map</a:t>
-            </a:r>
-          </a:p>
-        </p:txBody>
-      </p:sp>
-      <p:sp>
-        <p:nvSpPr>
-          <p:cNvPr id="3" name="ellipse 1" descr="sci-ppt:obj-001"/>
-          <p:cNvSpPr/>
+              <a:t>A-E14 · Finite work-budget comparison</a:t>
+            </a:r>
+          </a:p>
+        </p:txBody>
+      </p:sp>
+      <p:sp>
+        <p:nvSpPr>
+          <p:cNvPr id="3" name="A-E14 text 1" descr="sci-ppt:o001"/>
+          <p:cNvSpPr txBox="1"/>
           <p:nvPr/>
         </p:nvSpPr>
         <p:spPr>
           <a:xfrm>
-            <a:off x="941832" y="932688"/>
-            <a:ext cx="1408176" cy="1408176"/>
-          </a:xfrm>
-          <a:prstGeom prst="ellipse">
+            <a:off x="457200" y="914400"/>
+            <a:ext cx="11247120" cy="254889"/>
+          </a:xfrm>
+          <a:prstGeom prst="rect">
             <a:avLst/>
           </a:prstGeom>
           <a:noFill/>
-          <a:ln w="17780">
+          <a:effectLst/>
+        </p:spPr>
+        <p:txBody>
+          <a:bodyPr wrap="none" lIns="18288" rIns="18288" tIns="18288" bIns="18288" anchor="t">
+            <a:spAutoFit/>
+          </a:bodyPr>
+          <a:lstStyle/>
+          <a:p>
+            <a:pPr algn="l">
+              <a:spcAft>
+                <a:spcPts val="0"/>
+              </a:spcAft>
+            </a:pPr>
+            <a:r>
+              <a:rPr sz="1350" b="1" i="0">
+                <a:solidFill>
+                  <a:srgbClr val="8EDBD4"/>
+                </a:solidFill>
+                <a:latin typeface="Arial"/>
+              </a:rPr>
+              <a:t>Work needed to open the cavity against a 100 kPa overpressure</a:t>
+            </a:r>
+          </a:p>
+        </p:txBody>
+      </p:sp>
+      <p:sp>
+        <p:nvSpPr>
+          <p:cNvPr id="4" name="A-E14 text 2" descr="sci-ppt:o002"/>
+          <p:cNvSpPr txBox="1"/>
+          <p:nvPr/>
+        </p:nvSpPr>
+        <p:spPr>
+          <a:xfrm>
+            <a:off x="457200" y="1481328"/>
+            <a:ext cx="4114800" cy="247142"/>
+          </a:xfrm>
+          <a:prstGeom prst="rect">
+            <a:avLst/>
+          </a:prstGeom>
+          <a:noFill/>
+          <a:effectLst/>
+        </p:spPr>
+        <p:txBody>
+          <a:bodyPr wrap="none" lIns="18288" rIns="18288" tIns="18288" bIns="18288" anchor="t">
+            <a:spAutoFit/>
+          </a:bodyPr>
+          <a:lstStyle/>
+          <a:p>
+            <a:pPr algn="l">
+              <a:spcAft>
+                <a:spcPts val="0"/>
+              </a:spcAft>
+            </a:pPr>
+            <a:r>
+              <a:rPr sz="1300" b="0" i="0">
+                <a:solidFill>
+                  <a:srgbClr val="E7F0F3"/>
+                </a:solidFill>
+                <a:latin typeface="Arial"/>
+              </a:rPr>
+              <a:t>available  W₁₀₀ = Δp_w ΔV</a:t>
+            </a:r>
+          </a:p>
+        </p:txBody>
+      </p:sp>
+      <p:sp>
+        <p:nvSpPr>
+          <p:cNvPr id="5" name="A-E14 rect 3" descr="sci-ppt:o003"/>
+          <p:cNvSpPr/>
+          <p:nvPr/>
+        </p:nvSpPr>
+        <p:spPr>
+          <a:xfrm>
+            <a:off x="4663440" y="1463040"/>
+            <a:ext cx="5188046" cy="502920"/>
+          </a:xfrm>
+          <a:prstGeom prst="rect">
+            <a:avLst/>
+          </a:prstGeom>
+          <a:solidFill>
+            <a:srgbClr val="8EDBD4">
+              <a:alpha val="85000"/>
+            </a:srgbClr>
+          </a:solidFill>
+          <a:ln w="12700">
             <a:solidFill>
-              <a:srgbClr val="B4C7D2"/>
+              <a:srgbClr val="8EDBD4">
+                <a:alpha val="85000"/>
+              </a:srgbClr>
             </a:solidFill>
           </a:ln>
           <a:effectLst/>
@@ -3168,24 +3254,296 @@
       </p:sp>
       <p:sp>
         <p:nvSpPr>
-          <p:cNvPr id="4" name="ellipse 2" descr="sci-ppt:obj-002"/>
+          <p:cNvPr id="6" name="A-E14 text 4" descr="sci-ppt:o004"/>
+          <p:cNvSpPr txBox="1"/>
+          <p:nvPr/>
+        </p:nvSpPr>
+        <p:spPr>
+          <a:xfrm>
+            <a:off x="9924638" y="1508760"/>
+            <a:ext cx="1371600" cy="247142"/>
+          </a:xfrm>
+          <a:prstGeom prst="rect">
+            <a:avLst/>
+          </a:prstGeom>
+          <a:noFill/>
+          <a:effectLst/>
+        </p:spPr>
+        <p:txBody>
+          <a:bodyPr wrap="none" lIns="18288" rIns="18288" tIns="18288" bIns="18288" anchor="t">
+            <a:spAutoFit/>
+          </a:bodyPr>
+          <a:lstStyle/>
+          <a:p>
+            <a:pPr algn="l">
+              <a:spcAft>
+                <a:spcPts val="0"/>
+              </a:spcAft>
+            </a:pPr>
+            <a:r>
+              <a:rPr sz="1300" b="1" i="0">
+                <a:solidFill>
+                  <a:srgbClr val="E7F0F3"/>
+                </a:solidFill>
+                <a:latin typeface="Arial"/>
+              </a:rPr>
+              <a:t>11.257 nJ</a:t>
+            </a:r>
+          </a:p>
+        </p:txBody>
+      </p:sp>
+      <p:sp>
+        <p:nvSpPr>
+          <p:cNvPr id="7" name="A-E14 text 5" descr="sci-ppt:o005"/>
+          <p:cNvSpPr txBox="1"/>
+          <p:nvPr/>
+        </p:nvSpPr>
+        <p:spPr>
+          <a:xfrm>
+            <a:off x="457200" y="2258568"/>
+            <a:ext cx="4114800" cy="247142"/>
+          </a:xfrm>
+          <a:prstGeom prst="rect">
+            <a:avLst/>
+          </a:prstGeom>
+          <a:noFill/>
+          <a:effectLst/>
+        </p:spPr>
+        <p:txBody>
+          <a:bodyPr wrap="none" lIns="18288" rIns="18288" tIns="18288" bIns="18288" anchor="t">
+            <a:spAutoFit/>
+          </a:bodyPr>
+          <a:lstStyle/>
+          <a:p>
+            <a:pPr algn="l">
+              <a:spcAft>
+                <a:spcPts val="0"/>
+              </a:spcAft>
+            </a:pPr>
+            <a:r>
+              <a:rPr sz="1300" b="0" i="0">
+                <a:solidFill>
+                  <a:srgbClr val="E7F0F3"/>
+                </a:solidFill>
+                <a:latin typeface="Arial"/>
+              </a:rPr>
+              <a:t>elastic cost  W_g</a:t>
+            </a:r>
+          </a:p>
+        </p:txBody>
+      </p:sp>
+      <p:sp>
+        <p:nvSpPr>
+          <p:cNvPr id="8" name="A-E14 rect 6" descr="sci-ppt:o006"/>
           <p:cNvSpPr/>
           <p:nvPr/>
         </p:nvSpPr>
         <p:spPr>
           <a:xfrm>
-            <a:off x="1380744" y="1371600"/>
-            <a:ext cx="530352" cy="530352"/>
-          </a:xfrm>
-          <a:prstGeom prst="ellipse">
+            <a:off x="4663440" y="2240280"/>
+            <a:ext cx="2081251" cy="502920"/>
+          </a:xfrm>
+          <a:prstGeom prst="rect">
+            <a:avLst/>
+          </a:prstGeom>
+          <a:solidFill>
+            <a:srgbClr val="F28BA0">
+              <a:alpha val="85000"/>
+            </a:srgbClr>
+          </a:solidFill>
+          <a:ln w="12700">
+            <a:solidFill>
+              <a:srgbClr val="F28BA0">
+                <a:alpha val="85000"/>
+              </a:srgbClr>
+            </a:solidFill>
+          </a:ln>
+          <a:effectLst/>
+        </p:spPr>
+        <p:txBody>
+          <a:bodyPr rtlCol="0" anchor="ctr"/>
+          <a:lstStyle/>
+          <a:p>
+            <a:pPr algn="ctr"/>
+          </a:p>
+        </p:txBody>
+      </p:sp>
+      <p:sp>
+        <p:nvSpPr>
+          <p:cNvPr id="9" name="A-E14 text 7" descr="sci-ppt:o007"/>
+          <p:cNvSpPr txBox="1"/>
+          <p:nvPr/>
+        </p:nvSpPr>
+        <p:spPr>
+          <a:xfrm>
+            <a:off x="6817843" y="2286000"/>
+            <a:ext cx="1371600" cy="247142"/>
+          </a:xfrm>
+          <a:prstGeom prst="rect">
+            <a:avLst/>
+          </a:prstGeom>
+          <a:noFill/>
+          <a:effectLst/>
+        </p:spPr>
+        <p:txBody>
+          <a:bodyPr wrap="none" lIns="18288" rIns="18288" tIns="18288" bIns="18288" anchor="t">
+            <a:spAutoFit/>
+          </a:bodyPr>
+          <a:lstStyle/>
+          <a:p>
+            <a:pPr algn="l">
+              <a:spcAft>
+                <a:spcPts val="0"/>
+              </a:spcAft>
+            </a:pPr>
+            <a:r>
+              <a:rPr sz="1300" b="1" i="0">
+                <a:solidFill>
+                  <a:srgbClr val="E7F0F3"/>
+                </a:solidFill>
+                <a:latin typeface="Arial"/>
+              </a:rPr>
+              <a:t>4.516 nJ</a:t>
+            </a:r>
+          </a:p>
+        </p:txBody>
+      </p:sp>
+      <p:sp>
+        <p:nvSpPr>
+          <p:cNvPr id="10" name="A-E14 text 8" descr="sci-ppt:o008"/>
+          <p:cNvSpPr txBox="1"/>
+          <p:nvPr/>
+        </p:nvSpPr>
+        <p:spPr>
+          <a:xfrm>
+            <a:off x="457200" y="3035808"/>
+            <a:ext cx="4114800" cy="247142"/>
+          </a:xfrm>
+          <a:prstGeom prst="rect">
+            <a:avLst/>
+          </a:prstGeom>
+          <a:noFill/>
+          <a:effectLst/>
+        </p:spPr>
+        <p:txBody>
+          <a:bodyPr wrap="none" lIns="18288" rIns="18288" tIns="18288" bIns="18288" anchor="t">
+            <a:spAutoFit/>
+          </a:bodyPr>
+          <a:lstStyle/>
+          <a:p>
+            <a:pPr algn="l">
+              <a:spcAft>
+                <a:spcPts val="0"/>
+              </a:spcAft>
+            </a:pPr>
+            <a:r>
+              <a:rPr sz="1300" b="0" i="0">
+                <a:solidFill>
+                  <a:srgbClr val="E7F0F3"/>
+                </a:solidFill>
+                <a:latin typeface="Arial"/>
+              </a:rPr>
+              <a:t>left over  W₁₀₀ − W_g</a:t>
+            </a:r>
+          </a:p>
+        </p:txBody>
+      </p:sp>
+      <p:sp>
+        <p:nvSpPr>
+          <p:cNvPr id="11" name="A-E14 rect 9" descr="sci-ppt:o009"/>
+          <p:cNvSpPr/>
+          <p:nvPr/>
+        </p:nvSpPr>
+        <p:spPr>
+          <a:xfrm>
+            <a:off x="4663440" y="3017520"/>
+            <a:ext cx="3106795" cy="502920"/>
+          </a:xfrm>
+          <a:prstGeom prst="rect">
+            <a:avLst/>
+          </a:prstGeom>
+          <a:solidFill>
+            <a:srgbClr val="A8E6A1">
+              <a:alpha val="85000"/>
+            </a:srgbClr>
+          </a:solidFill>
+          <a:ln w="12700">
+            <a:solidFill>
+              <a:srgbClr val="A8E6A1">
+                <a:alpha val="85000"/>
+              </a:srgbClr>
+            </a:solidFill>
+          </a:ln>
+          <a:effectLst/>
+        </p:spPr>
+        <p:txBody>
+          <a:bodyPr rtlCol="0" anchor="ctr"/>
+          <a:lstStyle/>
+          <a:p>
+            <a:pPr algn="ctr"/>
+          </a:p>
+        </p:txBody>
+      </p:sp>
+      <p:sp>
+        <p:nvSpPr>
+          <p:cNvPr id="12" name="A-E14 text 10" descr="sci-ppt:o010"/>
+          <p:cNvSpPr txBox="1"/>
+          <p:nvPr/>
+        </p:nvSpPr>
+        <p:spPr>
+          <a:xfrm>
+            <a:off x="7843387" y="3063240"/>
+            <a:ext cx="1371600" cy="247142"/>
+          </a:xfrm>
+          <a:prstGeom prst="rect">
+            <a:avLst/>
+          </a:prstGeom>
+          <a:noFill/>
+          <a:effectLst/>
+        </p:spPr>
+        <p:txBody>
+          <a:bodyPr wrap="none" lIns="18288" rIns="18288" tIns="18288" bIns="18288" anchor="t">
+            <a:spAutoFit/>
+          </a:bodyPr>
+          <a:lstStyle/>
+          <a:p>
+            <a:pPr algn="l">
+              <a:spcAft>
+                <a:spcPts val="0"/>
+              </a:spcAft>
+            </a:pPr>
+            <a:r>
+              <a:rPr sz="1300" b="1" i="0">
+                <a:solidFill>
+                  <a:srgbClr val="E7F0F3"/>
+                </a:solidFill>
+                <a:latin typeface="Arial"/>
+              </a:rPr>
+              <a:t>6.741 nJ</a:t>
+            </a:r>
+          </a:p>
+        </p:txBody>
+      </p:sp>
+      <p:sp>
+        <p:nvSpPr>
+          <p:cNvPr id="13" name="A-E14 round_rect 11" descr="sci-ppt:o011"/>
+          <p:cNvSpPr/>
+          <p:nvPr/>
+        </p:nvSpPr>
+        <p:spPr>
+          <a:xfrm>
+            <a:off x="457200" y="3931920"/>
+            <a:ext cx="5486400" cy="1737360"/>
+          </a:xfrm>
+          <a:prstGeom prst="roundRect">
             <a:avLst/>
           </a:prstGeom>
           <a:solidFill>
             <a:srgbClr val="213E4B"/>
           </a:solidFill>
-          <a:ln w="17780">
+          <a:ln w="20320">
             <a:solidFill>
-              <a:srgbClr val="B4C7D2"/>
+              <a:srgbClr val="8EDBD4"/>
             </a:solidFill>
           </a:ln>
           <a:effectLst/>
@@ -3198,40 +3556,16 @@
           </a:p>
         </p:txBody>
       </p:sp>
-      <p:cxnSp>
-        <p:nvCxnSpPr>
-          <p:cNvPr id="5" name="arrow 3" descr="sci-ppt:obj-003"/>
-          <p:cNvCxnSpPr/>
-          <p:nvPr/>
-        </p:nvCxnSpPr>
-        <p:spPr>
-          <a:xfrm>
-            <a:off x="1645920" y="1636776"/>
-            <a:ext cx="704088" cy="0"/>
-          </a:xfrm>
-          <a:prstGeom prst="line">
-            <a:avLst/>
-          </a:prstGeom>
-          <a:ln w="21590">
-            <a:solidFill>
-              <a:srgbClr val="8EDBD4"/>
-            </a:solidFill>
-            <a:headEnd type="none" w="med" len="med"/>
-            <a:tailEnd type="triangle" w="med" len="med"/>
-          </a:ln>
-          <a:effectLst/>
-        </p:spPr>
-      </p:cxnSp>
-      <p:sp>
-        <p:nvSpPr>
-          <p:cNvPr id="6" name="text 4" descr="sci-ppt:obj-004"/>
+      <p:sp>
+        <p:nvSpPr>
+          <p:cNvPr id="14" name="A-E14 text 12" descr="sci-ppt:o012"/>
           <p:cNvSpPr txBox="1"/>
           <p:nvPr/>
         </p:nvSpPr>
         <p:spPr>
           <a:xfrm>
-            <a:off x="2011680" y="1252728"/>
-            <a:ext cx="822960" cy="310896"/>
+            <a:off x="566928" y="3986783"/>
+            <a:ext cx="5266944" cy="247142"/>
           </a:xfrm>
           <a:prstGeom prst="rect">
             <a:avLst/>
@@ -3240,7 +3574,7 @@
           <a:effectLst/>
         </p:spPr>
         <p:txBody>
-          <a:bodyPr wrap="none" lIns="0" rIns="0" tIns="0" bIns="0" anchor="ctr">
+          <a:bodyPr wrap="none" lIns="18288" rIns="18288" tIns="18288" bIns="18288" anchor="t">
             <a:spAutoFit/>
           </a:bodyPr>
           <a:lstStyle/>
@@ -3251,27 +3585,67 @@
               </a:spcAft>
             </a:pPr>
             <a:r>
-              <a:rPr sz="1296" b="0" i="0">
+              <a:rPr sz="1300" b="1" i="0">
+                <a:solidFill>
+                  <a:srgbClr val="8EDBD4"/>
+                </a:solidFill>
+                <a:latin typeface="Arial"/>
+              </a:rPr>
+              <a:t>Volume and budget</a:t>
+            </a:r>
+          </a:p>
+        </p:txBody>
+      </p:sp>
+      <p:sp>
+        <p:nvSpPr>
+          <p:cNvPr id="15" name="A-E14 text 13" descr="sci-ppt:o013"/>
+          <p:cNvSpPr txBox="1"/>
+          <p:nvPr/>
+        </p:nvSpPr>
+        <p:spPr>
+          <a:xfrm>
+            <a:off x="594360" y="4389120"/>
+            <a:ext cx="5212080" cy="231648"/>
+          </a:xfrm>
+          <a:prstGeom prst="rect">
+            <a:avLst/>
+          </a:prstGeom>
+          <a:noFill/>
+          <a:effectLst/>
+        </p:spPr>
+        <p:txBody>
+          <a:bodyPr wrap="none" lIns="18288" rIns="18288" tIns="18288" bIns="18288" anchor="t">
+            <a:spAutoFit/>
+          </a:bodyPr>
+          <a:lstStyle/>
+          <a:p>
+            <a:pPr algn="l">
+              <a:spcAft>
+                <a:spcPts val="0"/>
+              </a:spcAft>
+            </a:pPr>
+            <a:r>
+              <a:rPr sz="1200" b="1" i="0">
                 <a:solidFill>
                   <a:srgbClr val="E7F0F3"/>
                 </a:solidFill>
                 <a:latin typeface="Arial"/>
               </a:rPr>
-              <a:t>R</a:t>
-            </a:r>
-          </a:p>
-        </p:txBody>
-      </p:sp>
-      <p:sp>
-        <p:nvSpPr>
-          <p:cNvPr id="7" name="text 5" descr="sci-ppt:obj-005"/>
+              <a:t>ΔV = (4π/3)(R³ − R_ref³) = 1.12573737e-13 m³</a:t>
+            </a:r>
+          </a:p>
+        </p:txBody>
+      </p:sp>
+      <p:sp>
+        <p:nvSpPr>
+          <p:cNvPr id="16" name="A-E14 text 14" descr="sci-ppt:o014"/>
           <p:cNvSpPr txBox="1"/>
           <p:nvPr/>
         </p:nvSpPr>
         <p:spPr>
           <a:xfrm>
-            <a:off x="1005840" y="2459736"/>
-            <a:ext cx="2194560" cy="310896"/>
+            <a:off x="594360" y="4937760"/>
+            <a:ext cx="5212080" cy="231648"/>
           </a:xfrm>
           <a:prstGeom prst="rect">
             <a:avLst/>
@@ -3280,7 +3654,7 @@
           <a:effectLst/>
         </p:spPr>
         <p:txBody>
-          <a:bodyPr wrap="none" lIns="0" rIns="0" tIns="0" bIns="0" anchor="ctr">
+          <a:bodyPr wrap="none" lIns="18288" rIns="18288" tIns="18288" bIns="18288" anchor="t">
             <a:spAutoFit/>
           </a:bodyPr>
           <a:lstStyle/>
@@ -3291,27 +3665,59 @@
               </a:spcAft>
             </a:pPr>
             <a:r>
-              <a:rPr sz="1296" b="0" i="0">
+              <a:rPr sz="1200" b="1" i="0">
                 <a:solidFill>
-                  <a:srgbClr val="E7F0F3"/>
+                  <a:srgbClr val="F2B880"/>
                 </a:solidFill>
                 <a:latin typeface="Arial"/>
               </a:rPr>
-              <a:t>Rref → R</a:t>
-            </a:r>
-          </a:p>
-        </p:txBody>
-      </p:sp>
-      <p:sp>
-        <p:nvSpPr>
-          <p:cNvPr id="8" name="text 6" descr="sci-ppt:obj-006"/>
+              <a:t>W₁₀₀ = (100 kPa)(ΔV) = 11.2574 nJ</a:t>
+            </a:r>
+          </a:p>
+        </p:txBody>
+      </p:sp>
+      <p:sp>
+        <p:nvSpPr>
+          <p:cNvPr id="17" name="A-E14 round_rect 15" descr="sci-ppt:o015"/>
+          <p:cNvSpPr/>
+          <p:nvPr/>
+        </p:nvSpPr>
+        <p:spPr>
+          <a:xfrm>
+            <a:off x="6217920" y="3931920"/>
+            <a:ext cx="5486400" cy="1737360"/>
+          </a:xfrm>
+          <a:prstGeom prst="roundRect">
+            <a:avLst/>
+          </a:prstGeom>
+          <a:solidFill>
+            <a:srgbClr val="213E4B"/>
+          </a:solidFill>
+          <a:ln w="20320">
+            <a:solidFill>
+              <a:srgbClr val="F28BA0"/>
+            </a:solidFill>
+          </a:ln>
+          <a:effectLst/>
+        </p:spPr>
+        <p:txBody>
+          <a:bodyPr rtlCol="0" anchor="ctr"/>
+          <a:lstStyle/>
+          <a:p>
+            <a:pPr algn="ctr"/>
+          </a:p>
+        </p:txBody>
+      </p:sp>
+      <p:sp>
+        <p:nvSpPr>
+          <p:cNvPr id="18" name="A-E14 text 16" descr="sci-ppt:o016"/>
           <p:cNvSpPr txBox="1"/>
           <p:nvPr/>
         </p:nvSpPr>
         <p:spPr>
           <a:xfrm>
-            <a:off x="749808" y="649224"/>
-            <a:ext cx="3566160" cy="310896"/>
+            <a:off x="6327648" y="3986783"/>
+            <a:ext cx="5266944" cy="247142"/>
           </a:xfrm>
           <a:prstGeom prst="rect">
             <a:avLst/>
@@ -3320,7 +3726,7 @@
           <a:effectLst/>
         </p:spPr>
         <p:txBody>
-          <a:bodyPr wrap="none" lIns="0" rIns="0" tIns="0" bIns="0" anchor="ctr">
+          <a:bodyPr wrap="none" lIns="18288" rIns="18288" tIns="18288" bIns="18288" anchor="t">
             <a:spAutoFit/>
           </a:bodyPr>
           <a:lstStyle/>
@@ -3331,59 +3737,27 @@
               </a:spcAft>
             </a:pPr>
             <a:r>
-              <a:rPr sz="1296" b="0" i="0">
+              <a:rPr sz="1300" b="1" i="0">
                 <a:solidFill>
-                  <a:srgbClr val="E7F0F3"/>
+                  <a:srgbClr val="F28BA0"/>
                 </a:solidFill>
                 <a:latin typeface="Arial"/>
               </a:rPr>
-              <a:t>Cavity pressure work: pb dV</a:t>
-            </a:r>
-          </a:p>
-        </p:txBody>
-      </p:sp>
-      <p:sp>
-        <p:nvSpPr>
-          <p:cNvPr id="9" name="rect 7" descr="sci-ppt:obj-007"/>
-          <p:cNvSpPr/>
-          <p:nvPr/>
-        </p:nvSpPr>
-        <p:spPr>
-          <a:xfrm>
-            <a:off x="3986784" y="1143000"/>
-            <a:ext cx="3749039" cy="1124712"/>
-          </a:xfrm>
-          <a:prstGeom prst="rect">
-            <a:avLst/>
-          </a:prstGeom>
-          <a:solidFill>
-            <a:srgbClr val="213E4B"/>
-          </a:solidFill>
-          <a:ln w="17780">
-            <a:solidFill>
-              <a:srgbClr val="B4C7D2"/>
-            </a:solidFill>
-          </a:ln>
-          <a:effectLst/>
-        </p:spPr>
-        <p:txBody>
-          <a:bodyPr rtlCol="0" anchor="ctr"/>
-          <a:lstStyle/>
-          <a:p>
-            <a:pPr algn="ctr"/>
-          </a:p>
-        </p:txBody>
-      </p:sp>
-      <p:sp>
-        <p:nvSpPr>
-          <p:cNvPr id="10" name="text 8" descr="sci-ppt:obj-008"/>
+              <a:t>Fraction</a:t>
+            </a:r>
+          </a:p>
+        </p:txBody>
+      </p:sp>
+      <p:sp>
+        <p:nvSpPr>
+          <p:cNvPr id="19" name="A-E14 text 17" descr="sci-ppt:o017"/>
           <p:cNvSpPr txBox="1"/>
           <p:nvPr/>
         </p:nvSpPr>
         <p:spPr>
           <a:xfrm>
-            <a:off x="4197096" y="1307592"/>
-            <a:ext cx="3474720" cy="310896"/>
+            <a:off x="6355080" y="4389120"/>
+            <a:ext cx="5212080" cy="278130"/>
           </a:xfrm>
           <a:prstGeom prst="rect">
             <a:avLst/>
@@ -3392,7 +3766,7 @@
           <a:effectLst/>
         </p:spPr>
         <p:txBody>
-          <a:bodyPr wrap="none" lIns="0" rIns="0" tIns="0" bIns="0" anchor="ctr">
+          <a:bodyPr wrap="none" lIns="18288" rIns="18288" tIns="18288" bIns="18288" anchor="t">
             <a:spAutoFit/>
           </a:bodyPr>
           <a:lstStyle/>
@@ -3403,27 +3777,27 @@
               </a:spcAft>
             </a:pPr>
             <a:r>
-              <a:rPr sz="1296" b="0" i="0">
+              <a:rPr sz="1500" b="1" i="0">
                 <a:solidFill>
-                  <a:srgbClr val="E7F0F3"/>
+                  <a:srgbClr val="F28BA0"/>
                 </a:solidFill>
                 <a:latin typeface="Arial"/>
               </a:rPr>
-              <a:t>Elastic storage: Wg</a:t>
-            </a:r>
-          </a:p>
-        </p:txBody>
-      </p:sp>
-      <p:sp>
-        <p:nvSpPr>
-          <p:cNvPr id="11" name="text 9" descr="sci-ppt:obj-009"/>
+              <a:t>W_g / W₁₀₀ = 0.401163</a:t>
+            </a:r>
+          </a:p>
+        </p:txBody>
+      </p:sp>
+      <p:sp>
+        <p:nvSpPr>
+          <p:cNvPr id="20" name="A-E14 text 18" descr="sci-ppt:o018"/>
           <p:cNvSpPr txBox="1"/>
           <p:nvPr/>
         </p:nvSpPr>
         <p:spPr>
           <a:xfrm>
-            <a:off x="4197096" y="1700784"/>
-            <a:ext cx="3474720" cy="310896"/>
+            <a:off x="6355080" y="4983480"/>
+            <a:ext cx="5212080" cy="231648"/>
           </a:xfrm>
           <a:prstGeom prst="rect">
             <a:avLst/>
@@ -3432,7 +3806,7 @@
           <a:effectLst/>
         </p:spPr>
         <p:txBody>
-          <a:bodyPr wrap="none" lIns="0" rIns="0" tIns="0" bIns="0" anchor="ctr">
+          <a:bodyPr wrap="none" lIns="18288" rIns="18288" tIns="18288" bIns="18288" anchor="t">
             <a:spAutoFit/>
           </a:bodyPr>
           <a:lstStyle/>
@@ -3443,51 +3817,27 @@
               </a:spcAft>
             </a:pPr>
             <a:r>
-              <a:rPr sz="1296" b="0" i="0">
+              <a:rPr sz="1200" b="0" i="0">
                 <a:solidFill>
-                  <a:srgbClr val="E7F0F3"/>
+                  <a:srgbClr val="B4C7D2"/>
                 </a:solidFill>
                 <a:latin typeface="Arial"/>
               </a:rPr>
-              <a:t>Viscous loss: Ḋg ≥ 0</a:t>
-            </a:r>
-          </a:p>
-        </p:txBody>
-      </p:sp>
-      <p:cxnSp>
-        <p:nvCxnSpPr>
-          <p:cNvPr id="12" name="arrow 10" descr="sci-ppt:obj-010"/>
-          <p:cNvCxnSpPr/>
-          <p:nvPr/>
-        </p:nvCxnSpPr>
-        <p:spPr>
-          <a:xfrm>
-            <a:off x="2496312" y="1645920"/>
-            <a:ext cx="1444751" cy="0"/>
-          </a:xfrm>
-          <a:prstGeom prst="line">
-            <a:avLst/>
-          </a:prstGeom>
-          <a:ln w="21590">
-            <a:solidFill>
-              <a:srgbClr val="8EDBD4"/>
-            </a:solidFill>
-            <a:headEnd type="none" w="med" len="med"/>
-            <a:tailEnd type="triangle" w="med" len="med"/>
-          </a:ln>
-          <a:effectLst/>
-        </p:spPr>
-      </p:cxnSp>
-      <p:sp>
-        <p:nvSpPr>
-          <p:cNvPr id="13" name="text 11" descr="sci-ppt:obj-011"/>
+              <a:t>about 40 % of the work budget is taken by elasticity</a:t>
+            </a:r>
+          </a:p>
+        </p:txBody>
+      </p:sp>
+      <p:sp>
+        <p:nvSpPr>
+          <p:cNvPr id="21" name="A-E14 text 19" descr="sci-ppt:o019"/>
           <p:cNvSpPr txBox="1"/>
           <p:nvPr/>
         </p:nvSpPr>
         <p:spPr>
           <a:xfrm>
-            <a:off x="3986784" y="2432304"/>
-            <a:ext cx="4114800" cy="310896"/>
+            <a:off x="320040" y="6510528"/>
+            <a:ext cx="11521440" cy="200660"/>
           </a:xfrm>
           <a:prstGeom prst="rect">
             <a:avLst/>
@@ -3496,7 +3846,7 @@
           <a:effectLst/>
         </p:spPr>
         <p:txBody>
-          <a:bodyPr wrap="none" lIns="0" rIns="0" tIns="0" bIns="0" anchor="ctr">
+          <a:bodyPr wrap="none" lIns="18288" rIns="18288" tIns="18288" bIns="18288" anchor="t">
             <a:spAutoFit/>
           </a:bodyPr>
           <a:lstStyle/>
@@ -3507,413 +3857,13 @@
               </a:spcAft>
             </a:pPr>
             <a:r>
-              <a:rPr sz="1296" b="0" i="0">
+              <a:rPr sz="1000" b="0" i="0">
                 <a:solidFill>
-                  <a:srgbClr val="E7F0F3"/>
+                  <a:srgbClr val="B4C7D2"/>
                 </a:solidFill>
                 <a:latin typeface="Arial"/>
               </a:rPr>
-              <a:t>Gg , ηg ; intact network</a:t>
-            </a:r>
-          </a:p>
-        </p:txBody>
-      </p:sp>
-      <p:sp>
-        <p:nvSpPr>
-          <p:cNvPr id="14" name="text 12" descr="sci-ppt:obj-012"/>
-          <p:cNvSpPr txBox="1"/>
-          <p:nvPr/>
-        </p:nvSpPr>
-        <p:spPr>
-          <a:xfrm>
-            <a:off x="749808" y="2871216"/>
-            <a:ext cx="7772400" cy="310896"/>
-          </a:xfrm>
-          <a:prstGeom prst="rect">
-            <a:avLst/>
-          </a:prstGeom>
-          <a:noFill/>
-          <a:effectLst/>
-        </p:spPr>
-        <p:txBody>
-          <a:bodyPr wrap="none" lIns="0" rIns="0" tIns="0" bIns="0" anchor="ctr">
-            <a:spAutoFit/>
-          </a:bodyPr>
-          <a:lstStyle/>
-          <a:p>
-            <a:pPr algn="l">
-              <a:spcAft>
-                <a:spcPts val="0"/>
-              </a:spcAft>
-            </a:pPr>
-            <a:r>
-              <a:rPr sz="1224" b="0" i="0">
-                <a:solidFill>
-                  <a:srgbClr val="E7F0F3"/>
-                </a:solidFill>
-                <a:latin typeface="Arial"/>
-              </a:rPr>
-              <a:t>Jet energy requires a separate load path and budget</a:t>
-            </a:r>
-          </a:p>
-        </p:txBody>
-      </p:sp>
-      <p:sp>
-        <p:nvSpPr>
-          <p:cNvPr id="15" name="text 13" descr="sci-ppt:obj-013"/>
-          <p:cNvSpPr txBox="1"/>
-          <p:nvPr/>
-        </p:nvSpPr>
-        <p:spPr>
-          <a:xfrm>
-            <a:off x="256032" y="3465576"/>
-            <a:ext cx="7315200" cy="310896"/>
-          </a:xfrm>
-          <a:prstGeom prst="rect">
-            <a:avLst/>
-          </a:prstGeom>
-          <a:noFill/>
-          <a:effectLst/>
-        </p:spPr>
-        <p:txBody>
-          <a:bodyPr wrap="none" lIns="0" rIns="0" tIns="0" bIns="0" anchor="ctr">
-            <a:spAutoFit/>
-          </a:bodyPr>
-          <a:lstStyle/>
-          <a:p>
-            <a:pPr algn="l">
-              <a:spcAft>
-                <a:spcPts val="0"/>
-              </a:spcAft>
-            </a:pPr>
-            <a:r>
-              <a:rPr sz="1296" b="0" i="0">
-                <a:solidFill>
-                  <a:srgbClr val="8EDBD4"/>
-                </a:solidFill>
-                <a:latin typeface="Arial"/>
-              </a:rPr>
-              <a:t>Variables and physical limits</a:t>
-            </a:r>
-          </a:p>
-        </p:txBody>
-      </p:sp>
-      <p:sp>
-        <p:nvSpPr>
-          <p:cNvPr id="16" name="text 14" descr="sci-ppt:obj-014"/>
-          <p:cNvSpPr txBox="1"/>
-          <p:nvPr/>
-        </p:nvSpPr>
-        <p:spPr>
-          <a:xfrm>
-            <a:off x="365760" y="3813048"/>
-            <a:ext cx="8412480" cy="310896"/>
-          </a:xfrm>
-          <a:prstGeom prst="rect">
-            <a:avLst/>
-          </a:prstGeom>
-          <a:noFill/>
-          <a:effectLst/>
-        </p:spPr>
-        <p:txBody>
-          <a:bodyPr wrap="none" lIns="0" rIns="0" tIns="0" bIns="0" anchor="ctr">
-            <a:spAutoFit/>
-          </a:bodyPr>
-          <a:lstStyle/>
-          <a:p>
-            <a:pPr algn="l">
-              <a:spcAft>
-                <a:spcPts val="0"/>
-              </a:spcAft>
-            </a:pPr>
-            <a:r>
-              <a:rPr sz="1152" b="0" i="0">
-                <a:solidFill>
-                  <a:srgbClr val="E7F0F3"/>
-                </a:solidFill>
-                <a:latin typeface="Arial"/>
-              </a:rPr>
-              <a:t>• Δpw = 100 kPa</a:t>
-            </a:r>
-          </a:p>
-        </p:txBody>
-      </p:sp>
-      <p:sp>
-        <p:nvSpPr>
-          <p:cNvPr id="17" name="text 15" descr="sci-ppt:obj-015"/>
-          <p:cNvSpPr txBox="1"/>
-          <p:nvPr/>
-        </p:nvSpPr>
-        <p:spPr>
-          <a:xfrm>
-            <a:off x="365760" y="4023360"/>
-            <a:ext cx="8412480" cy="310896"/>
-          </a:xfrm>
-          <a:prstGeom prst="rect">
-            <a:avLst/>
-          </a:prstGeom>
-          <a:noFill/>
-          <a:effectLst/>
-        </p:spPr>
-        <p:txBody>
-          <a:bodyPr wrap="none" lIns="0" rIns="0" tIns="0" bIns="0" anchor="ctr">
-            <a:spAutoFit/>
-          </a:bodyPr>
-          <a:lstStyle/>
-          <a:p>
-            <a:pPr algn="l">
-              <a:spcAft>
-                <a:spcPts val="0"/>
-              </a:spcAft>
-            </a:pPr>
-            <a:r>
-              <a:rPr sz="1152" b="0" i="0">
-                <a:solidFill>
-                  <a:srgbClr val="E7F0F3"/>
-                </a:solidFill>
-                <a:latin typeface="Arial"/>
-              </a:rPr>
-              <a:t>• ΔV: same cavity expansion</a:t>
-            </a:r>
-          </a:p>
-        </p:txBody>
-      </p:sp>
-      <p:sp>
-        <p:nvSpPr>
-          <p:cNvPr id="18" name="text 16" descr="sci-ppt:obj-016"/>
-          <p:cNvSpPr txBox="1"/>
-          <p:nvPr/>
-        </p:nvSpPr>
-        <p:spPr>
-          <a:xfrm>
-            <a:off x="365760" y="4233672"/>
-            <a:ext cx="8412480" cy="310896"/>
-          </a:xfrm>
-          <a:prstGeom prst="rect">
-            <a:avLst/>
-          </a:prstGeom>
-          <a:noFill/>
-          <a:effectLst/>
-        </p:spPr>
-        <p:txBody>
-          <a:bodyPr wrap="none" lIns="0" rIns="0" tIns="0" bIns="0" anchor="ctr">
-            <a:spAutoFit/>
-          </a:bodyPr>
-          <a:lstStyle/>
-          <a:p>
-            <a:pPr algn="l">
-              <a:spcAft>
-                <a:spcPts val="0"/>
-              </a:spcAft>
-            </a:pPr>
-            <a:r>
-              <a:rPr sz="1152" b="0" i="0">
-                <a:solidFill>
-                  <a:srgbClr val="E7F0F3"/>
-                </a:solidFill>
-                <a:latin typeface="Arial"/>
-              </a:rPr>
-              <a:t>• W100 = 11.2574 nJ</a:t>
-            </a:r>
-          </a:p>
-        </p:txBody>
-      </p:sp>
-      <p:sp>
-        <p:nvSpPr>
-          <p:cNvPr id="19" name="text 17" descr="sci-ppt:obj-017"/>
-          <p:cNvSpPr txBox="1"/>
-          <p:nvPr/>
-        </p:nvSpPr>
-        <p:spPr>
-          <a:xfrm>
-            <a:off x="365760" y="4443984"/>
-            <a:ext cx="8412480" cy="310896"/>
-          </a:xfrm>
-          <a:prstGeom prst="rect">
-            <a:avLst/>
-          </a:prstGeom>
-          <a:noFill/>
-          <a:effectLst/>
-        </p:spPr>
-        <p:txBody>
-          <a:bodyPr wrap="none" lIns="0" rIns="0" tIns="0" bIns="0" anchor="ctr">
-            <a:spAutoFit/>
-          </a:bodyPr>
-          <a:lstStyle/>
-          <a:p>
-            <a:pPr algn="l">
-              <a:spcAft>
-                <a:spcPts val="0"/>
-              </a:spcAft>
-            </a:pPr>
-            <a:r>
-              <a:rPr sz="1152" b="0" i="0">
-                <a:solidFill>
-                  <a:srgbClr val="E7F0F3"/>
-                </a:solidFill>
-                <a:latin typeface="Arial"/>
-              </a:rPr>
-              <a:t>• Wg = 4.51604 nJ</a:t>
-            </a:r>
-          </a:p>
-        </p:txBody>
-      </p:sp>
-      <p:sp>
-        <p:nvSpPr>
-          <p:cNvPr id="20" name="text 18" descr="sci-ppt:obj-018"/>
-          <p:cNvSpPr txBox="1"/>
-          <p:nvPr/>
-        </p:nvSpPr>
-        <p:spPr>
-          <a:xfrm>
-            <a:off x="365760" y="4654296"/>
-            <a:ext cx="8412480" cy="310896"/>
-          </a:xfrm>
-          <a:prstGeom prst="rect">
-            <a:avLst/>
-          </a:prstGeom>
-          <a:noFill/>
-          <a:effectLst/>
-        </p:spPr>
-        <p:txBody>
-          <a:bodyPr wrap="none" lIns="0" rIns="0" tIns="0" bIns="0" anchor="ctr">
-            <a:spAutoFit/>
-          </a:bodyPr>
-          <a:lstStyle/>
-          <a:p>
-            <a:pPr algn="l">
-              <a:spcAft>
-                <a:spcPts val="0"/>
-              </a:spcAft>
-            </a:pPr>
-            <a:r>
-              <a:rPr sz="1152" b="0" i="0">
-                <a:solidFill>
-                  <a:srgbClr val="E7F0F3"/>
-                </a:solidFill>
-                <a:latin typeface="Arial"/>
-              </a:rPr>
-              <a:t>• residual = 6.74133 nJ</a:t>
-            </a:r>
-          </a:p>
-        </p:txBody>
-      </p:sp>
-      <p:sp>
-        <p:nvSpPr>
-          <p:cNvPr id="21" name="text 19" descr="sci-ppt:obj-019"/>
-          <p:cNvSpPr txBox="1"/>
-          <p:nvPr/>
-        </p:nvSpPr>
-        <p:spPr>
-          <a:xfrm>
-            <a:off x="365760" y="4864608"/>
-            <a:ext cx="8412480" cy="310896"/>
-          </a:xfrm>
-          <a:prstGeom prst="rect">
-            <a:avLst/>
-          </a:prstGeom>
-          <a:noFill/>
-          <a:effectLst/>
-        </p:spPr>
-        <p:txBody>
-          <a:bodyPr wrap="none" lIns="0" rIns="0" tIns="0" bIns="0" anchor="ctr">
-            <a:spAutoFit/>
-          </a:bodyPr>
-          <a:lstStyle/>
-          <a:p>
-            <a:pPr algn="l">
-              <a:spcAft>
-                <a:spcPts val="0"/>
-              </a:spcAft>
-            </a:pPr>
-            <a:r>
-              <a:rPr sz="1152" b="0" i="0">
-                <a:solidFill>
-                  <a:srgbClr val="E7F0F3"/>
-                </a:solidFill>
-                <a:latin typeface="Arial"/>
-              </a:rPr>
-              <a:t>• R, Rref</a:t>
-            </a:r>
-          </a:p>
-        </p:txBody>
-      </p:sp>
-      <p:sp>
-        <p:nvSpPr>
-          <p:cNvPr id="22" name="text 20" descr="sci-ppt:obj-020"/>
-          <p:cNvSpPr txBox="1"/>
-          <p:nvPr/>
-        </p:nvSpPr>
-        <p:spPr>
-          <a:xfrm>
-            <a:off x="365760" y="5074920"/>
-            <a:ext cx="8412480" cy="310896"/>
-          </a:xfrm>
-          <a:prstGeom prst="rect">
-            <a:avLst/>
-          </a:prstGeom>
-          <a:noFill/>
-          <a:effectLst/>
-        </p:spPr>
-        <p:txBody>
-          <a:bodyPr wrap="none" lIns="0" rIns="0" tIns="0" bIns="0" anchor="ctr">
-            <a:spAutoFit/>
-          </a:bodyPr>
-          <a:lstStyle/>
-          <a:p>
-            <a:pPr algn="l">
-              <a:spcAft>
-                <a:spcPts val="0"/>
-              </a:spcAft>
-            </a:pPr>
-            <a:r>
-              <a:rPr sz="1152" b="0" i="0">
-                <a:solidFill>
-                  <a:srgbClr val="E7F0F3"/>
-                </a:solidFill>
-                <a:latin typeface="Arial"/>
-              </a:rPr>
-              <a:t>Compare energy at the same displaced volume</a:t>
-            </a:r>
-          </a:p>
-        </p:txBody>
-      </p:sp>
-      <p:sp>
-        <p:nvSpPr>
-          <p:cNvPr id="23" name="text 21" descr="sci-ppt:obj-021"/>
-          <p:cNvSpPr txBox="1"/>
-          <p:nvPr/>
-        </p:nvSpPr>
-        <p:spPr>
-          <a:xfrm>
-            <a:off x="365760" y="5285232"/>
-            <a:ext cx="8412480" cy="310896"/>
-          </a:xfrm>
-          <a:prstGeom prst="rect">
-            <a:avLst/>
-          </a:prstGeom>
-          <a:noFill/>
-          <a:effectLst/>
-        </p:spPr>
-        <p:txBody>
-          <a:bodyPr wrap="none" lIns="0" rIns="0" tIns="0" bIns="0" anchor="ctr">
-            <a:spAutoFit/>
-          </a:bodyPr>
-          <a:lstStyle/>
-          <a:p>
-            <a:pPr algn="l">
-              <a:spcAft>
-                <a:spcPts val="0"/>
-              </a:spcAft>
-            </a:pPr>
-            <a:r>
-              <a:rPr sz="1152" b="0" i="0">
-                <a:solidFill>
-                  <a:srgbClr val="E7F0F3"/>
-                </a:solidFill>
-                <a:latin typeface="Arial"/>
-              </a:rPr>
-              <a:t>Residual is not automatically an emitted jet</a:t>
+              <a:t>Finite work-budget comparison of Eq. A-E14 (Δp_w = 100 kPa).</a:t>
             </a:r>
           </a:p>
         </p:txBody>
